--- a/docs/examples/presentations/complete-series-slides.pptx
+++ b/docs/examples/presentations/complete-series-slides.pptx
@@ -5081,7 +5081,7 @@
         </p:nvGraphicFramePr>
         <p:xfrm>
           <a:off x="731520" y="1280160"/>
-          <a:ext cx="7680960" cy="914400"/>
+          <a:ext cx="7680960" cy="1097280"/>
         </p:xfrm>
         <a:graphic>
           <a:graphicData uri="http://schemas.openxmlformats.org/drawingml/2006/table">
@@ -7141,7 +7141,7 @@
         </p:nvGraphicFramePr>
         <p:xfrm>
           <a:off x="731520" y="1280160"/>
-          <a:ext cx="7680960" cy="914400"/>
+          <a:ext cx="7680960" cy="1371600"/>
         </p:xfrm>
         <a:graphic>
           <a:graphicData uri="http://schemas.openxmlformats.org/drawingml/2006/table">
@@ -9318,7 +9318,7 @@
         </p:nvGraphicFramePr>
         <p:xfrm>
           <a:off x="731520" y="1280160"/>
-          <a:ext cx="7680960" cy="914400"/>
+          <a:ext cx="7680960" cy="1645920"/>
         </p:xfrm>
         <a:graphic>
           <a:graphicData uri="http://schemas.openxmlformats.org/drawingml/2006/table">
@@ -11427,7 +11427,7 @@
         </p:nvGraphicFramePr>
         <p:xfrm>
           <a:off x="731520" y="1920240"/>
-          <a:ext cx="7680960" cy="914400"/>
+          <a:ext cx="7680960" cy="1097280"/>
         </p:xfrm>
         <a:graphic>
           <a:graphicData uri="http://schemas.openxmlformats.org/drawingml/2006/table">
@@ -12520,7 +12520,7 @@
                 <a:ea typeface="Calibri" pitchFamily="34" charset="-122"/>
                 <a:cs typeface="Calibri" pitchFamily="34" charset="-120"/>
               </a:rPr>
-              <a:t>Not tribal knowledge.</a:t>
+              <a:t>Not “tribal” knowledge.</a:t>
             </a:r>
             <a:endParaRPr lang="en-US" sz="1200" dirty="0"/>
           </a:p>
@@ -14764,7 +14764,7 @@
         </p:nvGraphicFramePr>
         <p:xfrm>
           <a:off x="731520" y="3291840"/>
-          <a:ext cx="7680960" cy="914400"/>
+          <a:ext cx="7680960" cy="1097280"/>
         </p:xfrm>
         <a:graphic>
           <a:graphicData uri="http://schemas.openxmlformats.org/drawingml/2006/table">
@@ -15582,7 +15582,7 @@
         </p:nvGraphicFramePr>
         <p:xfrm>
           <a:off x="731520" y="1280160"/>
-          <a:ext cx="7680960" cy="914400"/>
+          <a:ext cx="7680960" cy="1645920"/>
         </p:xfrm>
         <a:graphic>
           <a:graphicData uri="http://schemas.openxmlformats.org/drawingml/2006/table">
@@ -18725,7 +18725,7 @@
         </p:nvGraphicFramePr>
         <p:xfrm>
           <a:off x="731520" y="1280160"/>
-          <a:ext cx="7680960" cy="914400"/>
+          <a:ext cx="7680960" cy="1371600"/>
         </p:xfrm>
         <a:graphic>
           <a:graphicData uri="http://schemas.openxmlformats.org/drawingml/2006/table">
